--- a/python_course/chapter_06_dictionaries/presentation.pptx
+++ b/python_course/chapter_06_dictionaries/presentation.pptx
@@ -18,7 +18,7 @@
     <p:sldId id="266" r:id="rId17"/>
     <p:sldId id="267" r:id="rId18"/>
   </p:sldIdLst>
-  <p:sldSz cx="9144000" cy="6858000" type="screen4x3"/>
+  <p:sldSz cx="12191695" cy="6858000" type="screen4x3"/>
   <p:notesSz cx="6858000" cy="9144000"/>
   <p:defaultTextStyle>
     <a:defPPr>
@@ -3108,7 +3108,7 @@
         <p:spPr>
           <a:xfrm>
             <a:off x="0" y="0"/>
-            <a:ext cx="9144000" cy="6858000"/>
+            <a:ext cx="12191695" cy="6858000"/>
           </a:xfrm>
           <a:prstGeom prst="rect">
             <a:avLst/>
@@ -3150,8 +3150,8 @@
         </p:nvSpPr>
         <p:spPr>
           <a:xfrm>
-            <a:off x="914400" y="2286000"/>
-            <a:ext cx="7315200" cy="914400"/>
+            <a:off x="914400" y="1828800"/>
+            <a:ext cx="10360152" cy="1371600"/>
           </a:xfrm>
           <a:prstGeom prst="rect">
             <a:avLst/>
@@ -3185,8 +3185,8 @@
         </p:nvSpPr>
         <p:spPr>
           <a:xfrm>
-            <a:off x="914400" y="3474720"/>
-            <a:ext cx="7315200" cy="548640"/>
+            <a:off x="914400" y="3657600"/>
+            <a:ext cx="10360152" cy="548640"/>
           </a:xfrm>
           <a:prstGeom prst="rect">
             <a:avLst/>
@@ -3220,8 +3220,8 @@
         </p:nvSpPr>
         <p:spPr>
           <a:xfrm>
-            <a:off x="914400" y="4114800"/>
-            <a:ext cx="7315200" cy="548640"/>
+            <a:off x="914400" y="4297680"/>
+            <a:ext cx="10360152" cy="548640"/>
           </a:xfrm>
           <a:prstGeom prst="rect">
             <a:avLst/>
@@ -3274,7 +3274,7 @@
         <p:spPr>
           <a:xfrm>
             <a:off x="0" y="0"/>
-            <a:ext cx="9144000" cy="6858000"/>
+            <a:ext cx="12191695" cy="6858000"/>
           </a:xfrm>
           <a:prstGeom prst="rect">
             <a:avLst/>
@@ -3317,7 +3317,7 @@
         <p:spPr>
           <a:xfrm>
             <a:off x="0" y="0"/>
-            <a:ext cx="9144000" cy="137160"/>
+            <a:ext cx="12191695" cy="137160"/>
           </a:xfrm>
           <a:prstGeom prst="rect">
             <a:avLst/>
@@ -3360,7 +3360,7 @@
         <p:spPr>
           <a:xfrm>
             <a:off x="457200" y="365760"/>
-            <a:ext cx="8229600" cy="731520"/>
+            <a:ext cx="10972800" cy="731520"/>
           </a:xfrm>
           <a:prstGeom prst="rect">
             <a:avLst/>
@@ -3456,7 +3456,7 @@
         <p:spPr>
           <a:xfrm>
             <a:off x="0" y="0"/>
-            <a:ext cx="9144000" cy="6858000"/>
+            <a:ext cx="12191695" cy="6858000"/>
           </a:xfrm>
           <a:prstGeom prst="rect">
             <a:avLst/>
@@ -3499,7 +3499,7 @@
         <p:spPr>
           <a:xfrm>
             <a:off x="0" y="0"/>
-            <a:ext cx="9144000" cy="137160"/>
+            <a:ext cx="12191695" cy="137160"/>
           </a:xfrm>
           <a:prstGeom prst="rect">
             <a:avLst/>
@@ -3542,7 +3542,7 @@
         <p:spPr>
           <a:xfrm>
             <a:off x="457200" y="365760"/>
-            <a:ext cx="8229600" cy="731520"/>
+            <a:ext cx="10972800" cy="731520"/>
           </a:xfrm>
           <a:prstGeom prst="rect">
             <a:avLst/>
@@ -3620,7 +3620,7 @@
         <p:spPr>
           <a:xfrm>
             <a:off x="640080" y="1371600"/>
-            <a:ext cx="7863840" cy="3657600"/>
+            <a:ext cx="10789920" cy="4572000"/>
           </a:xfrm>
           <a:prstGeom prst="rect">
             <a:avLst/>
@@ -3706,7 +3706,7 @@
         <p:spPr>
           <a:xfrm>
             <a:off x="0" y="0"/>
-            <a:ext cx="9144000" cy="6858000"/>
+            <a:ext cx="12191695" cy="6858000"/>
           </a:xfrm>
           <a:prstGeom prst="rect">
             <a:avLst/>
@@ -3748,8 +3748,8 @@
         </p:nvSpPr>
         <p:spPr>
           <a:xfrm>
-            <a:off x="914400" y="2286000"/>
-            <a:ext cx="7315200" cy="914400"/>
+            <a:off x="914400" y="1828800"/>
+            <a:ext cx="10360152" cy="1371600"/>
           </a:xfrm>
           <a:prstGeom prst="rect">
             <a:avLst/>
@@ -3783,8 +3783,8 @@
         </p:nvSpPr>
         <p:spPr>
           <a:xfrm>
-            <a:off x="914400" y="3474720"/>
-            <a:ext cx="7315200" cy="548640"/>
+            <a:off x="914400" y="3657600"/>
+            <a:ext cx="10360152" cy="548640"/>
           </a:xfrm>
           <a:prstGeom prst="rect">
             <a:avLst/>
@@ -3818,8 +3818,8 @@
         </p:nvSpPr>
         <p:spPr>
           <a:xfrm>
-            <a:off x="914400" y="4114800"/>
-            <a:ext cx="7315200" cy="548640"/>
+            <a:off x="914400" y="4297680"/>
+            <a:ext cx="10360152" cy="548640"/>
           </a:xfrm>
           <a:prstGeom prst="rect">
             <a:avLst/>
@@ -3872,7 +3872,7 @@
         <p:spPr>
           <a:xfrm>
             <a:off x="0" y="0"/>
-            <a:ext cx="9144000" cy="6858000"/>
+            <a:ext cx="12191695" cy="6858000"/>
           </a:xfrm>
           <a:prstGeom prst="rect">
             <a:avLst/>
@@ -3915,7 +3915,7 @@
         <p:spPr>
           <a:xfrm>
             <a:off x="0" y="0"/>
-            <a:ext cx="9144000" cy="137160"/>
+            <a:ext cx="12191695" cy="137160"/>
           </a:xfrm>
           <a:prstGeom prst="rect">
             <a:avLst/>
@@ -3958,7 +3958,7 @@
         <p:spPr>
           <a:xfrm>
             <a:off x="457200" y="365760"/>
-            <a:ext cx="8229600" cy="731520"/>
+            <a:ext cx="10972800" cy="731520"/>
           </a:xfrm>
           <a:prstGeom prst="rect">
             <a:avLst/>
@@ -4036,7 +4036,7 @@
         <p:spPr>
           <a:xfrm>
             <a:off x="640080" y="1371600"/>
-            <a:ext cx="7863840" cy="3657600"/>
+            <a:ext cx="10789920" cy="4572000"/>
           </a:xfrm>
           <a:prstGeom prst="rect">
             <a:avLst/>
@@ -4137,7 +4137,7 @@
         <p:spPr>
           <a:xfrm>
             <a:off x="0" y="0"/>
-            <a:ext cx="9144000" cy="6858000"/>
+            <a:ext cx="12191695" cy="6858000"/>
           </a:xfrm>
           <a:prstGeom prst="rect">
             <a:avLst/>
@@ -4180,7 +4180,7 @@
         <p:spPr>
           <a:xfrm>
             <a:off x="0" y="0"/>
-            <a:ext cx="9144000" cy="137160"/>
+            <a:ext cx="12191695" cy="137160"/>
           </a:xfrm>
           <a:prstGeom prst="rect">
             <a:avLst/>
@@ -4223,7 +4223,7 @@
         <p:spPr>
           <a:xfrm>
             <a:off x="457200" y="365760"/>
-            <a:ext cx="8229600" cy="731520"/>
+            <a:ext cx="10972800" cy="731520"/>
           </a:xfrm>
           <a:prstGeom prst="rect">
             <a:avLst/>
@@ -4301,7 +4301,7 @@
         <p:spPr>
           <a:xfrm>
             <a:off x="640080" y="1371600"/>
-            <a:ext cx="7863840" cy="3657600"/>
+            <a:ext cx="10789920" cy="4572000"/>
           </a:xfrm>
           <a:prstGeom prst="rect">
             <a:avLst/>
@@ -4477,7 +4477,7 @@
         <p:spPr>
           <a:xfrm>
             <a:off x="0" y="0"/>
-            <a:ext cx="9144000" cy="6858000"/>
+            <a:ext cx="12191695" cy="6858000"/>
           </a:xfrm>
           <a:prstGeom prst="rect">
             <a:avLst/>
@@ -4520,7 +4520,7 @@
         <p:spPr>
           <a:xfrm>
             <a:off x="0" y="0"/>
-            <a:ext cx="9144000" cy="137160"/>
+            <a:ext cx="12191695" cy="137160"/>
           </a:xfrm>
           <a:prstGeom prst="rect">
             <a:avLst/>
@@ -4563,7 +4563,7 @@
         <p:spPr>
           <a:xfrm>
             <a:off x="457200" y="365760"/>
-            <a:ext cx="8229600" cy="731520"/>
+            <a:ext cx="10972800" cy="731520"/>
           </a:xfrm>
           <a:prstGeom prst="rect">
             <a:avLst/>
@@ -4641,7 +4641,7 @@
         <p:spPr>
           <a:xfrm>
             <a:off x="640080" y="1371600"/>
-            <a:ext cx="7863840" cy="3657600"/>
+            <a:ext cx="10789920" cy="4572000"/>
           </a:xfrm>
           <a:prstGeom prst="rect">
             <a:avLst/>
@@ -4727,7 +4727,7 @@
         <p:spPr>
           <a:xfrm>
             <a:off x="0" y="0"/>
-            <a:ext cx="9144000" cy="6858000"/>
+            <a:ext cx="12191695" cy="6858000"/>
           </a:xfrm>
           <a:prstGeom prst="rect">
             <a:avLst/>
@@ -4770,7 +4770,7 @@
         <p:spPr>
           <a:xfrm>
             <a:off x="0" y="0"/>
-            <a:ext cx="9144000" cy="137160"/>
+            <a:ext cx="12191695" cy="137160"/>
           </a:xfrm>
           <a:prstGeom prst="rect">
             <a:avLst/>
@@ -4813,7 +4813,7 @@
         <p:spPr>
           <a:xfrm>
             <a:off x="457200" y="365760"/>
-            <a:ext cx="8229600" cy="731520"/>
+            <a:ext cx="10972800" cy="731520"/>
           </a:xfrm>
           <a:prstGeom prst="rect">
             <a:avLst/>
@@ -4891,7 +4891,7 @@
         <p:spPr>
           <a:xfrm>
             <a:off x="640080" y="1371600"/>
-            <a:ext cx="7863840" cy="3657600"/>
+            <a:ext cx="10789920" cy="4572000"/>
           </a:xfrm>
           <a:prstGeom prst="rect">
             <a:avLst/>
@@ -4992,7 +4992,7 @@
         <p:spPr>
           <a:xfrm>
             <a:off x="0" y="0"/>
-            <a:ext cx="9144000" cy="6858000"/>
+            <a:ext cx="12191695" cy="6858000"/>
           </a:xfrm>
           <a:prstGeom prst="rect">
             <a:avLst/>
@@ -5035,7 +5035,7 @@
         <p:spPr>
           <a:xfrm>
             <a:off x="0" y="0"/>
-            <a:ext cx="9144000" cy="137160"/>
+            <a:ext cx="12191695" cy="137160"/>
           </a:xfrm>
           <a:prstGeom prst="rect">
             <a:avLst/>
@@ -5078,7 +5078,7 @@
         <p:spPr>
           <a:xfrm>
             <a:off x="457200" y="365760"/>
-            <a:ext cx="8229600" cy="731520"/>
+            <a:ext cx="10972800" cy="731520"/>
           </a:xfrm>
           <a:prstGeom prst="rect">
             <a:avLst/>
@@ -5156,7 +5156,7 @@
         <p:spPr>
           <a:xfrm>
             <a:off x="640080" y="1371600"/>
-            <a:ext cx="7863840" cy="3657600"/>
+            <a:ext cx="10789920" cy="4572000"/>
           </a:xfrm>
           <a:prstGeom prst="rect">
             <a:avLst/>
@@ -5242,7 +5242,7 @@
         <p:spPr>
           <a:xfrm>
             <a:off x="0" y="0"/>
-            <a:ext cx="9144000" cy="6858000"/>
+            <a:ext cx="12191695" cy="6858000"/>
           </a:xfrm>
           <a:prstGeom prst="rect">
             <a:avLst/>
@@ -5285,7 +5285,7 @@
         <p:spPr>
           <a:xfrm>
             <a:off x="0" y="0"/>
-            <a:ext cx="9144000" cy="137160"/>
+            <a:ext cx="12191695" cy="137160"/>
           </a:xfrm>
           <a:prstGeom prst="rect">
             <a:avLst/>
@@ -5328,7 +5328,7 @@
         <p:spPr>
           <a:xfrm>
             <a:off x="457200" y="365760"/>
-            <a:ext cx="8229600" cy="731520"/>
+            <a:ext cx="10972800" cy="731520"/>
           </a:xfrm>
           <a:prstGeom prst="rect">
             <a:avLst/>
@@ -5406,7 +5406,7 @@
         <p:spPr>
           <a:xfrm>
             <a:off x="640080" y="1371600"/>
-            <a:ext cx="7863840" cy="3657600"/>
+            <a:ext cx="10789920" cy="4572000"/>
           </a:xfrm>
           <a:prstGeom prst="rect">
             <a:avLst/>
@@ -5522,7 +5522,7 @@
         <p:spPr>
           <a:xfrm>
             <a:off x="0" y="0"/>
-            <a:ext cx="9144000" cy="6858000"/>
+            <a:ext cx="12191695" cy="6858000"/>
           </a:xfrm>
           <a:prstGeom prst="rect">
             <a:avLst/>
@@ -5565,7 +5565,7 @@
         <p:spPr>
           <a:xfrm>
             <a:off x="0" y="0"/>
-            <a:ext cx="9144000" cy="137160"/>
+            <a:ext cx="12191695" cy="137160"/>
           </a:xfrm>
           <a:prstGeom prst="rect">
             <a:avLst/>
@@ -5608,7 +5608,7 @@
         <p:spPr>
           <a:xfrm>
             <a:off x="457200" y="365760"/>
-            <a:ext cx="8229600" cy="731520"/>
+            <a:ext cx="10972800" cy="731520"/>
           </a:xfrm>
           <a:prstGeom prst="rect">
             <a:avLst/>
@@ -5686,7 +5686,7 @@
         <p:spPr>
           <a:xfrm>
             <a:off x="640080" y="1371600"/>
-            <a:ext cx="7863840" cy="3657600"/>
+            <a:ext cx="10789920" cy="4572000"/>
           </a:xfrm>
           <a:prstGeom prst="rect">
             <a:avLst/>
@@ -5772,7 +5772,7 @@
         <p:spPr>
           <a:xfrm>
             <a:off x="0" y="0"/>
-            <a:ext cx="9144000" cy="6858000"/>
+            <a:ext cx="12191695" cy="6858000"/>
           </a:xfrm>
           <a:prstGeom prst="rect">
             <a:avLst/>
@@ -5815,7 +5815,7 @@
         <p:spPr>
           <a:xfrm>
             <a:off x="0" y="0"/>
-            <a:ext cx="9144000" cy="137160"/>
+            <a:ext cx="12191695" cy="137160"/>
           </a:xfrm>
           <a:prstGeom prst="rect">
             <a:avLst/>
@@ -5858,7 +5858,7 @@
         <p:spPr>
           <a:xfrm>
             <a:off x="457200" y="365760"/>
-            <a:ext cx="8229600" cy="731520"/>
+            <a:ext cx="10972800" cy="731520"/>
           </a:xfrm>
           <a:prstGeom prst="rect">
             <a:avLst/>
@@ -5936,7 +5936,7 @@
         <p:spPr>
           <a:xfrm>
             <a:off x="640080" y="1371600"/>
-            <a:ext cx="7863840" cy="3657600"/>
+            <a:ext cx="10789920" cy="4572000"/>
           </a:xfrm>
           <a:prstGeom prst="rect">
             <a:avLst/>
